--- a/Clase_8/PPT/Clase08_LDA.pptx
+++ b/Clase_8/PPT/Clase08_LDA.pptx
@@ -4252,8 +4252,8 @@
         </p:nvSpPr>
         <p:spPr>
           <a:xfrm>
-            <a:off x="0" y="4754880"/>
-            <a:ext cx="9144000" cy="388620"/>
+            <a:off x="0" y="4841748"/>
+            <a:ext cx="9144000" cy="301752"/>
           </a:xfrm>
           <a:prstGeom prst="rect">
             <a:avLst/>
